--- a/outsystems/niveau-1/deel-10/slidedeck.pptx
+++ b/outsystems/niveau-1/deel-10/slidedeck.pptx
@@ -3212,8 +3212,8 @@
         </p:nvSpPr>
         <p:spPr>
           <a:xfrm>
-            <a:off x="640080" y="457200"/>
-            <a:ext cx="10881360" cy="731520"/>
+            <a:off x="640080" y="365760"/>
+            <a:ext cx="10881360" cy="640080"/>
           </a:xfrm>
           <a:prstGeom prst="rect">
             <a:avLst/>
@@ -3228,7 +3228,7 @@
           <a:p>
             <a:pPr algn="l"/>
             <a:r>
-              <a:rPr sz="2600" b="1">
+              <a:rPr sz="2400" b="1">
                 <a:solidFill>
                   <a:srgbClr val="14213D"/>
                 </a:solidFill>
@@ -3248,8 +3248,8 @@
           <p:nvPr/>
         </p:nvGraphicFramePr>
         <p:xfrm>
-          <a:off x="640080" y="1371600"/>
-          <a:ext cx="10881360" cy="2743200"/>
+          <a:off x="640080" y="1097280"/>
+          <a:ext cx="10881360" cy="2286000"/>
         </p:xfrm>
         <a:graphic>
           <a:graphicData uri="http://schemas.openxmlformats.org/drawingml/2006/table">
@@ -3261,14 +3261,14 @@
                 <a:gridCol w="5440680"/>
                 <a:gridCol w="5440680"/>
               </a:tblGrid>
-              <a:tr h="548640">
+              <a:tr h="457200">
                 <a:tc>
                   <a:txBody>
                     <a:bodyPr/>
                     <a:lstStyle/>
                     <a:p>
                       <a:r>
-                        <a:rPr sz="1600" b="1"/>
+                        <a:rPr sz="1400" b="1"/>
                         <a:t>Criterium</a:t>
                       </a:r>
                     </a:p>
@@ -3281,7 +3281,7 @@
                     <a:lstStyle/>
                     <a:p>
                       <a:r>
-                        <a:rPr sz="1600" b="1"/>
+                        <a:rPr sz="1400" b="1"/>
                         <a:t>Waar het om gaat</a:t>
                       </a:r>
                     </a:p>
@@ -3289,14 +3289,14 @@
                   <a:tcPr/>
                 </a:tc>
               </a:tr>
-              <a:tr h="548640">
+              <a:tr h="457200">
                 <a:tc>
                   <a:txBody>
                     <a:bodyPr/>
                     <a:lstStyle/>
                     <a:p>
                       <a:r>
-                        <a:rPr sz="1600"/>
+                        <a:rPr sz="1400"/>
                         <a:t>Functionele volledigheid</a:t>
                       </a:r>
                     </a:p>
@@ -3309,7 +3309,7 @@
                     <a:lstStyle/>
                     <a:p>
                       <a:r>
-                        <a:rPr sz="1600"/>
+                        <a:rPr sz="1400"/>
                         <a:t>Werkt de applicatie, in beide sporen?</a:t>
                       </a:r>
                     </a:p>
@@ -3317,14 +3317,14 @@
                   <a:tcPr/>
                 </a:tc>
               </a:tr>
-              <a:tr h="548640">
+              <a:tr h="457200">
                 <a:tc>
                   <a:txBody>
                     <a:bodyPr/>
                     <a:lstStyle/>
                     <a:p>
                       <a:r>
-                        <a:rPr sz="1600"/>
+                        <a:rPr sz="1400"/>
                         <a:t>Verantwoording van keuzes</a:t>
                       </a:r>
                     </a:p>
@@ -3337,7 +3337,7 @@
                     <a:lstStyle/>
                     <a:p>
                       <a:r>
-                        <a:rPr sz="1600"/>
+                        <a:rPr sz="1400"/>
                         <a:t>Kun je uitleggen waarom?</a:t>
                       </a:r>
                     </a:p>
@@ -3345,14 +3345,14 @@
                   <a:tcPr/>
                 </a:tc>
               </a:tr>
-              <a:tr h="548640">
+              <a:tr h="457200">
                 <a:tc>
                   <a:txBody>
                     <a:bodyPr/>
                     <a:lstStyle/>
                     <a:p>
                       <a:r>
-                        <a:rPr sz="1600"/>
+                        <a:rPr sz="1400"/>
                         <a:t>Rolgevoeligheid</a:t>
                       </a:r>
                     </a:p>
@@ -3365,7 +3365,7 @@
                     <a:lstStyle/>
                     <a:p>
                       <a:r>
-                        <a:rPr sz="1600"/>
+                        <a:rPr sz="1400"/>
                         <a:t>Pas je je antwoord aan op wie het vraagt?</a:t>
                       </a:r>
                     </a:p>
@@ -3373,14 +3373,14 @@
                   <a:tcPr/>
                 </a:tc>
               </a:tr>
-              <a:tr h="548640">
+              <a:tr h="457200">
                 <a:tc>
                   <a:txBody>
                     <a:bodyPr/>
                     <a:lstStyle/>
                     <a:p>
                       <a:r>
-                        <a:rPr sz="1600"/>
+                        <a:rPr sz="1400"/>
                         <a:t>Omgaan met eigen gebreken</a:t>
                       </a:r>
                     </a:p>
@@ -3393,7 +3393,7 @@
                     <a:lstStyle/>
                     <a:p>
                       <a:r>
-                        <a:rPr sz="1600"/>
+                        <a:rPr sz="1400"/>
                         <a:t>Erken je zelf wat nog niet af is?</a:t>
                       </a:r>
                     </a:p>
@@ -3547,8 +3547,8 @@
         </p:nvSpPr>
         <p:spPr>
           <a:xfrm>
-            <a:off x="640080" y="548640"/>
-            <a:ext cx="10881360" cy="914400"/>
+            <a:off x="640080" y="457200"/>
+            <a:ext cx="10881360" cy="822960"/>
           </a:xfrm>
           <a:prstGeom prst="rect">
             <a:avLst/>
@@ -3740,8 +3740,8 @@
         </p:nvSpPr>
         <p:spPr>
           <a:xfrm>
-            <a:off x="640080" y="548640"/>
-            <a:ext cx="10881360" cy="914400"/>
+            <a:off x="640080" y="457200"/>
+            <a:ext cx="10881360" cy="822960"/>
           </a:xfrm>
           <a:prstGeom prst="rect">
             <a:avLst/>
@@ -3775,8 +3775,8 @@
         </p:nvSpPr>
         <p:spPr>
           <a:xfrm>
-            <a:off x="822960" y="1737360"/>
-            <a:ext cx="10515600" cy="4114800"/>
+            <a:off x="640080" y="1463040"/>
+            <a:ext cx="5029200" cy="4937760"/>
           </a:xfrm>
           <a:prstGeom prst="rect">
             <a:avLst/>
@@ -3791,7 +3791,7 @@
           <a:p>
             <a:pPr algn="l"/>
             <a:r>
-              <a:rPr sz="2000" b="0">
+              <a:rPr sz="1700" b="0">
                 <a:solidFill>
                   <a:srgbClr val="14213D"/>
                 </a:solidFill>
@@ -3803,7 +3803,7 @@
           <a:p>
             <a:pPr algn="l"/>
             <a:r>
-              <a:rPr sz="2000" b="0">
+              <a:rPr sz="1700" b="0">
                 <a:solidFill>
                   <a:srgbClr val="14213D"/>
                 </a:solidFill>
@@ -3815,7 +3815,7 @@
           <a:p>
             <a:pPr algn="l"/>
             <a:r>
-              <a:rPr sz="2000" b="0">
+              <a:rPr sz="1700" b="0">
                 <a:solidFill>
                   <a:srgbClr val="14213D"/>
                 </a:solidFill>
@@ -3826,41 +3826,30 @@
           </a:p>
         </p:txBody>
       </p:sp>
-      <p:sp>
-        <p:nvSpPr>
-          <p:cNvPr id="4" name="TextBox 3"/>
-          <p:cNvSpPr txBox="1"/>
+      <p:pic>
+        <p:nvPicPr>
+          <p:cNvPr id="4" name="Picture 3" descr="figuur-10-1.png"/>
+          <p:cNvPicPr>
+            <a:picLocks noChangeAspect="1"/>
+          </p:cNvPicPr>
           <p:nvPr/>
-        </p:nvSpPr>
+        </p:nvPicPr>
+        <p:blipFill>
+          <a:blip r:embed="rId2"/>
+          <a:stretch>
+            <a:fillRect/>
+          </a:stretch>
+        </p:blipFill>
         <p:spPr>
           <a:xfrm>
-            <a:off x="822960" y="5943600"/>
-            <a:ext cx="10515600" cy="731520"/>
+            <a:off x="5852160" y="2114876"/>
+            <a:ext cx="5669280" cy="3725526"/>
           </a:xfrm>
           <a:prstGeom prst="rect">
             <a:avLst/>
           </a:prstGeom>
-          <a:noFill/>
         </p:spPr>
-        <p:txBody>
-          <a:bodyPr wrap="square">
-            <a:spAutoFit/>
-          </a:bodyPr>
-          <a:lstStyle/>
-          <a:p>
-            <a:pPr algn="l"/>
-            <a:r>
-              <a:rPr sz="1300" b="0">
-                <a:solidFill>
-                  <a:srgbClr val="999999"/>
-                </a:solidFill>
-                <a:latin typeface="DM Sans"/>
-              </a:rPr>
-              <a:t>[FIGUUR 10-1: Overzicht alle negen onderdelen samenkomend in Verzuimmeldingen]</a:t>
-            </a:r>
-          </a:p>
-        </p:txBody>
-      </p:sp>
+      </p:pic>
     </p:spTree>
   </p:cSld>
   <p:clrMapOvr>
@@ -3956,8 +3945,8 @@
         </p:nvSpPr>
         <p:spPr>
           <a:xfrm>
-            <a:off x="640080" y="548640"/>
-            <a:ext cx="10881360" cy="914400"/>
+            <a:off x="640080" y="457200"/>
+            <a:ext cx="10881360" cy="822960"/>
           </a:xfrm>
           <a:prstGeom prst="rect">
             <a:avLst/>
@@ -4161,8 +4150,8 @@
         </p:nvSpPr>
         <p:spPr>
           <a:xfrm>
-            <a:off x="640080" y="548640"/>
-            <a:ext cx="10881360" cy="914400"/>
+            <a:off x="640080" y="457200"/>
+            <a:ext cx="10881360" cy="822960"/>
           </a:xfrm>
           <a:prstGeom prst="rect">
             <a:avLst/>
@@ -4246,8 +4235,8 @@
         </p:nvSpPr>
         <p:spPr>
           <a:xfrm>
-            <a:off x="640080" y="548640"/>
-            <a:ext cx="10881360" cy="914400"/>
+            <a:off x="640080" y="457200"/>
+            <a:ext cx="10881360" cy="822960"/>
           </a:xfrm>
           <a:prstGeom prst="rect">
             <a:avLst/>
@@ -4331,8 +4320,8 @@
         </p:nvSpPr>
         <p:spPr>
           <a:xfrm>
-            <a:off x="640080" y="548640"/>
-            <a:ext cx="10881360" cy="914400"/>
+            <a:off x="640080" y="457200"/>
+            <a:ext cx="10881360" cy="822960"/>
           </a:xfrm>
           <a:prstGeom prst="rect">
             <a:avLst/>
